--- a/deck.pptx
+++ b/deck.pptx
@@ -3932,7 +3932,7 @@
       </p:sp>
       <p:pic>
         <p:nvPicPr>
-          <p:cNvPr id="8" name="Picture 7" descr="latencia_barras.png"/>
+          <p:cNvPr id="8" name="Picture 7" descr="latencia_barras.jpg"/>
           <p:cNvPicPr>
             <a:picLocks noChangeAspect="1"/>
           </p:cNvPicPr>
@@ -7480,7 +7480,7 @@
       </p:sp>
       <p:pic>
         <p:nvPicPr>
-          <p:cNvPr id="8" name="Picture 7" descr="sol2_agentforce_hub.png"/>
+          <p:cNvPr id="8" name="Picture 7" descr="sol2_agentforce_hub.jpg"/>
           <p:cNvPicPr>
             <a:picLocks noChangeAspect="1"/>
           </p:cNvPicPr>
@@ -7741,7 +7741,7 @@
       </p:sp>
       <p:pic>
         <p:nvPicPr>
-          <p:cNvPr id="8" name="Picture 7" descr="sol2_journey.png"/>
+          <p:cNvPr id="8" name="Picture 7" descr="sol2_journey.jpg"/>
           <p:cNvPicPr>
             <a:picLocks noChangeAspect="1"/>
           </p:cNvPicPr>
@@ -12618,7 +12618,7 @@
       </p:sp>
       <p:pic>
         <p:nvPicPr>
-          <p:cNvPr id="8" name="Picture 7" descr="comparativo_vs.png"/>
+          <p:cNvPr id="8" name="Picture 7" descr="comparativo_vs.jpg"/>
           <p:cNvPicPr>
             <a:picLocks noChangeAspect="1"/>
           </p:cNvPicPr>
@@ -14088,7 +14088,7 @@
       </p:sp>
       <p:pic>
         <p:nvPicPr>
-          <p:cNvPr id="8" name="Picture 7" descr="roi_acumulado.png"/>
+          <p:cNvPr id="8" name="Picture 7" descr="roi_acumulado.jpg"/>
           <p:cNvPicPr>
             <a:picLocks noChangeAspect="1"/>
           </p:cNvPicPr>
@@ -24376,7 +24376,7 @@
       </p:sp>
       <p:pic>
         <p:nvPicPr>
-          <p:cNvPr id="8" name="Picture 7" descr="cliente_swimlanes.png"/>
+          <p:cNvPr id="8" name="Picture 7" descr="cliente_swimlanes.jpg"/>
           <p:cNvPicPr>
             <a:picLocks noChangeAspect="1"/>
           </p:cNvPicPr>
@@ -25743,7 +25743,7 @@
       </p:sp>
       <p:pic>
         <p:nvPicPr>
-          <p:cNvPr id="8" name="Picture 7" descr="sol1_arquitectura.png"/>
+          <p:cNvPr id="8" name="Picture 7" descr="sol1_arquitectura.jpg"/>
           <p:cNvPicPr>
             <a:picLocks noChangeAspect="1"/>
           </p:cNvPicPr>
@@ -26004,7 +26004,7 @@
       </p:sp>
       <p:pic>
         <p:nvPicPr>
-          <p:cNvPr id="8" name="Picture 7" descr="sol1_journey.png"/>
+          <p:cNvPr id="8" name="Picture 7" descr="sol1_journey.jpg"/>
           <p:cNvPicPr>
             <a:picLocks noChangeAspect="1"/>
           </p:cNvPicPr>
@@ -26265,7 +26265,7 @@
       </p:sp>
       <p:pic>
         <p:nvPicPr>
-          <p:cNvPr id="8" name="Picture 7" descr="formulario_opciones.png"/>
+          <p:cNvPr id="8" name="Picture 7" descr="formulario_opciones.jpg"/>
           <p:cNvPicPr>
             <a:picLocks noChangeAspect="1"/>
           </p:cNvPicPr>
